--- a/Projects/Presentation_DSA.pptx
+++ b/Projects/Presentation_DSA.pptx
@@ -5,7 +5,7 @@
     <p:sldMasterId id="2147483684" r:id="rId1"/>
   </p:sldMasterIdLst>
   <p:notesMasterIdLst>
-    <p:notesMasterId r:id="rId15"/>
+    <p:notesMasterId r:id="rId20"/>
   </p:notesMasterIdLst>
   <p:sldIdLst>
     <p:sldId id="256" r:id="rId2"/>
@@ -21,6 +21,11 @@
     <p:sldId id="266" r:id="rId12"/>
     <p:sldId id="267" r:id="rId13"/>
     <p:sldId id="268" r:id="rId14"/>
+    <p:sldId id="269" r:id="rId15"/>
+    <p:sldId id="270" r:id="rId16"/>
+    <p:sldId id="271" r:id="rId17"/>
+    <p:sldId id="272" r:id="rId18"/>
+    <p:sldId id="273" r:id="rId19"/>
   </p:sldIdLst>
   <p:sldSz cx="9144000" cy="6858000" type="screen4x3"/>
   <p:notesSz cx="6858000" cy="9144000"/>
@@ -204,7 +209,8 @@
           <a:p>
             <a:fld id="{8619FABA-AAED-4B5D-930F-B2B83D617882}" type="datetimeFigureOut">
               <a:rPr lang="en-US" smtClean="0"/>
-              <a:t>9/24/2026</a:t>
+              <a:pPr/>
+              <a:t>9/25/2026</a:t>
             </a:fld>
             <a:endParaRPr lang="en-US"/>
           </a:p>
@@ -365,6 +371,7 @@
           <a:p>
             <a:fld id="{C4396E60-E0EC-42C3-8C4C-B6B7D7FA4A29}" type="slidenum">
               <a:rPr lang="en-US" smtClean="0"/>
+              <a:pPr/>
               <a:t>‹#›</a:t>
             </a:fld>
             <a:endParaRPr lang="en-US"/>
@@ -759,7 +766,8 @@
           <a:p>
             <a:fld id="{BE3DD433-409F-4551-BAC6-CEE242ECCDF8}" type="datetimeFigureOut">
               <a:rPr lang="en-US" smtClean="0"/>
-              <a:t>9/24/2026</a:t>
+              <a:pPr/>
+              <a:t>9/25/2026</a:t>
             </a:fld>
             <a:endParaRPr lang="en-US"/>
           </a:p>
@@ -782,6 +790,7 @@
           <a:p>
             <a:fld id="{F80996C0-72B3-41EA-8C61-45746BCF72C9}" type="slidenum">
               <a:rPr lang="en-US" smtClean="0"/>
+              <a:pPr/>
               <a:t>‹#›</a:t>
             </a:fld>
             <a:endParaRPr lang="en-US"/>
@@ -924,7 +933,8 @@
           <a:p>
             <a:fld id="{BE3DD433-409F-4551-BAC6-CEE242ECCDF8}" type="datetimeFigureOut">
               <a:rPr lang="en-US" smtClean="0"/>
-              <a:t>9/24/2026</a:t>
+              <a:pPr/>
+              <a:t>9/25/2026</a:t>
             </a:fld>
             <a:endParaRPr lang="en-US"/>
           </a:p>
@@ -966,6 +976,7 @@
           <a:p>
             <a:fld id="{F80996C0-72B3-41EA-8C61-45746BCF72C9}" type="slidenum">
               <a:rPr lang="en-US" smtClean="0"/>
+              <a:pPr/>
               <a:t>‹#›</a:t>
             </a:fld>
             <a:endParaRPr lang="en-US"/>
@@ -1099,7 +1110,8 @@
           <a:p>
             <a:fld id="{BE3DD433-409F-4551-BAC6-CEE242ECCDF8}" type="datetimeFigureOut">
               <a:rPr lang="en-US" smtClean="0"/>
-              <a:t>9/24/2026</a:t>
+              <a:pPr/>
+              <a:t>9/25/2026</a:t>
             </a:fld>
             <a:endParaRPr lang="en-US"/>
           </a:p>
@@ -1141,6 +1153,7 @@
           <a:p>
             <a:fld id="{F80996C0-72B3-41EA-8C61-45746BCF72C9}" type="slidenum">
               <a:rPr lang="en-US" smtClean="0"/>
+              <a:pPr/>
               <a:t>‹#›</a:t>
             </a:fld>
             <a:endParaRPr lang="en-US"/>
@@ -1246,7 +1259,8 @@
           <a:p>
             <a:fld id="{BE3DD433-409F-4551-BAC6-CEE242ECCDF8}" type="datetimeFigureOut">
               <a:rPr lang="en-US" smtClean="0"/>
-              <a:t>9/24/2026</a:t>
+              <a:pPr/>
+              <a:t>9/25/2026</a:t>
             </a:fld>
             <a:endParaRPr lang="en-US"/>
           </a:p>
@@ -1273,6 +1287,7 @@
           <a:p>
             <a:fld id="{F80996C0-72B3-41EA-8C61-45746BCF72C9}" type="slidenum">
               <a:rPr lang="en-US" smtClean="0"/>
+              <a:pPr/>
               <a:t>‹#›</a:t>
             </a:fld>
             <a:endParaRPr lang="en-US"/>
@@ -1363,7 +1378,8 @@
           <a:p>
             <a:fld id="{BE3DD433-409F-4551-BAC6-CEE242ECCDF8}" type="datetimeFigureOut">
               <a:rPr lang="en-US" smtClean="0"/>
-              <a:t>9/24/2026</a:t>
+              <a:pPr/>
+              <a:t>9/25/2026</a:t>
             </a:fld>
             <a:endParaRPr lang="en-US"/>
           </a:p>
@@ -1405,6 +1421,7 @@
           <a:p>
             <a:fld id="{F80996C0-72B3-41EA-8C61-45746BCF72C9}" type="slidenum">
               <a:rPr lang="en-US" smtClean="0"/>
+              <a:pPr/>
               <a:t>‹#›</a:t>
             </a:fld>
             <a:endParaRPr lang="en-US"/>
@@ -1633,7 +1650,8 @@
           <a:p>
             <a:fld id="{BE3DD433-409F-4551-BAC6-CEE242ECCDF8}" type="datetimeFigureOut">
               <a:rPr lang="en-US" smtClean="0"/>
-              <a:t>9/24/2026</a:t>
+              <a:pPr/>
+              <a:t>9/25/2026</a:t>
             </a:fld>
             <a:endParaRPr lang="en-US"/>
           </a:p>
@@ -1675,6 +1693,7 @@
           <a:p>
             <a:fld id="{F80996C0-72B3-41EA-8C61-45746BCF72C9}" type="slidenum">
               <a:rPr lang="en-US" smtClean="0"/>
+              <a:pPr/>
               <a:t>‹#›</a:t>
             </a:fld>
             <a:endParaRPr lang="en-US"/>
@@ -1860,6 +1879,7 @@
           <a:p>
             <a:fld id="{F80996C0-72B3-41EA-8C61-45746BCF72C9}" type="slidenum">
               <a:rPr lang="en-US" smtClean="0"/>
+              <a:pPr/>
               <a:t>‹#›</a:t>
             </a:fld>
             <a:endParaRPr lang="en-US"/>
@@ -1902,7 +1922,8 @@
           <a:p>
             <a:fld id="{BE3DD433-409F-4551-BAC6-CEE242ECCDF8}" type="datetimeFigureOut">
               <a:rPr lang="en-US" smtClean="0"/>
-              <a:t>9/24/2026</a:t>
+              <a:pPr/>
+              <a:t>9/25/2026</a:t>
             </a:fld>
             <a:endParaRPr lang="en-US"/>
           </a:p>
@@ -2349,7 +2370,8 @@
           <a:p>
             <a:fld id="{BE3DD433-409F-4551-BAC6-CEE242ECCDF8}" type="datetimeFigureOut">
               <a:rPr lang="en-US" smtClean="0"/>
-              <a:t>9/24/2026</a:t>
+              <a:pPr/>
+              <a:t>9/25/2026</a:t>
             </a:fld>
             <a:endParaRPr lang="en-US"/>
           </a:p>
@@ -2391,6 +2413,7 @@
           <a:p>
             <a:fld id="{F80996C0-72B3-41EA-8C61-45746BCF72C9}" type="slidenum">
               <a:rPr lang="en-US" smtClean="0"/>
+              <a:pPr/>
               <a:t>‹#›</a:t>
             </a:fld>
             <a:endParaRPr lang="en-US"/>
@@ -2462,7 +2485,8 @@
           <a:p>
             <a:fld id="{BE3DD433-409F-4551-BAC6-CEE242ECCDF8}" type="datetimeFigureOut">
               <a:rPr lang="en-US" smtClean="0"/>
-              <a:t>9/24/2026</a:t>
+              <a:pPr/>
+              <a:t>9/25/2026</a:t>
             </a:fld>
             <a:endParaRPr lang="en-US"/>
           </a:p>
@@ -2504,6 +2528,7 @@
           <a:p>
             <a:fld id="{F80996C0-72B3-41EA-8C61-45746BCF72C9}" type="slidenum">
               <a:rPr lang="en-US" smtClean="0"/>
+              <a:pPr/>
               <a:t>‹#›</a:t>
             </a:fld>
             <a:endParaRPr lang="en-US"/>
@@ -2712,7 +2737,8 @@
           <a:p>
             <a:fld id="{BE3DD433-409F-4551-BAC6-CEE242ECCDF8}" type="datetimeFigureOut">
               <a:rPr lang="en-US" smtClean="0"/>
-              <a:t>9/24/2026</a:t>
+              <a:pPr/>
+              <a:t>9/25/2026</a:t>
             </a:fld>
             <a:endParaRPr lang="en-US"/>
           </a:p>
@@ -2735,6 +2761,7 @@
           <a:p>
             <a:fld id="{F80996C0-72B3-41EA-8C61-45746BCF72C9}" type="slidenum">
               <a:rPr lang="en-US" smtClean="0"/>
+              <a:pPr/>
               <a:t>‹#›</a:t>
             </a:fld>
             <a:endParaRPr lang="en-US"/>
@@ -2952,7 +2979,8 @@
           <a:p>
             <a:fld id="{BE3DD433-409F-4551-BAC6-CEE242ECCDF8}" type="datetimeFigureOut">
               <a:rPr lang="en-US" smtClean="0"/>
-              <a:t>9/24/2026</a:t>
+              <a:pPr/>
+              <a:t>9/25/2026</a:t>
             </a:fld>
             <a:endParaRPr lang="en-US"/>
           </a:p>
@@ -2975,6 +3003,7 @@
           <a:p>
             <a:fld id="{F80996C0-72B3-41EA-8C61-45746BCF72C9}" type="slidenum">
               <a:rPr lang="en-US" smtClean="0"/>
+              <a:pPr/>
               <a:t>‹#›</a:t>
             </a:fld>
             <a:endParaRPr lang="en-US"/>
@@ -3125,7 +3154,8 @@
           <a:p>
             <a:fld id="{BE3DD433-409F-4551-BAC6-CEE242ECCDF8}" type="datetimeFigureOut">
               <a:rPr lang="en-US" smtClean="0"/>
-              <a:t>9/24/2026</a:t>
+              <a:pPr/>
+              <a:t>9/25/2026</a:t>
             </a:fld>
             <a:endParaRPr lang="en-US"/>
           </a:p>
@@ -3202,6 +3232,7 @@
           <a:p>
             <a:fld id="{F80996C0-72B3-41EA-8C61-45746BCF72C9}" type="slidenum">
               <a:rPr lang="en-US" smtClean="0"/>
+              <a:pPr/>
               <a:t>‹#›</a:t>
             </a:fld>
             <a:endParaRPr lang="en-US"/>
@@ -3907,11 +3938,7 @@
             <a:pPr marL="342900" indent="-342900" algn="just"/>
             <a:r>
               <a:rPr lang="en-US" sz="2400" dirty="0" smtClean="0"/>
-              <a:t>	Print(‘</a:t>
-            </a:r>
-            <a:r>
-              <a:rPr lang="en-US" sz="2400" dirty="0" smtClean="0"/>
-              <a:t>Stack Empty’)</a:t>
+              <a:t>	Print(‘Stack Empty’)</a:t>
             </a:r>
           </a:p>
           <a:p>
@@ -4482,6 +4509,1401 @@
   <p:transition>
     <p:randomBar/>
   </p:transition>
+</p:sld>
+</file>
+
+<file path=ppt/slides/slide14.xml><?xml version="1.0" encoding="utf-8"?>
+<p:sld xmlns:a="http://schemas.openxmlformats.org/drawingml/2006/main" xmlns:r="http://schemas.openxmlformats.org/officeDocument/2006/relationships" xmlns:p="http://schemas.openxmlformats.org/presentationml/2006/main">
+  <p:cSld>
+    <p:spTree>
+      <p:nvGrpSpPr>
+        <p:cNvPr id="1" name=""/>
+        <p:cNvGrpSpPr/>
+        <p:nvPr/>
+      </p:nvGrpSpPr>
+      <p:grpSpPr>
+        <a:xfrm>
+          <a:off x="0" y="0"/>
+          <a:ext cx="0" cy="0"/>
+          <a:chOff x="0" y="0"/>
+          <a:chExt cx="0" cy="0"/>
+        </a:xfrm>
+      </p:grpSpPr>
+      <p:sp>
+        <p:nvSpPr>
+          <p:cNvPr id="4" name="TextBox 3"/>
+          <p:cNvSpPr txBox="1"/>
+          <p:nvPr/>
+        </p:nvSpPr>
+        <p:spPr>
+          <a:xfrm>
+            <a:off x="685800" y="533400"/>
+            <a:ext cx="8153400" cy="523220"/>
+          </a:xfrm>
+          <a:prstGeom prst="rect">
+            <a:avLst/>
+          </a:prstGeom>
+          <a:noFill/>
+        </p:spPr>
+        <p:txBody>
+          <a:bodyPr wrap="square" rtlCol="0">
+            <a:spAutoFit/>
+          </a:bodyPr>
+          <a:lstStyle/>
+          <a:p>
+            <a:r>
+              <a:rPr lang="en-US" sz="2800" b="1" dirty="0" smtClean="0"/>
+              <a:t>Implemnet Of  Stack Using Linked List In C++</a:t>
+            </a:r>
+            <a:endParaRPr lang="en-US" sz="2800" b="1" dirty="0"/>
+          </a:p>
+        </p:txBody>
+      </p:sp>
+      <p:sp>
+        <p:nvSpPr>
+          <p:cNvPr id="5" name="TextBox 4"/>
+          <p:cNvSpPr txBox="1"/>
+          <p:nvPr/>
+        </p:nvSpPr>
+        <p:spPr>
+          <a:xfrm>
+            <a:off x="762000" y="1219200"/>
+            <a:ext cx="7543800" cy="5632311"/>
+          </a:xfrm>
+          <a:prstGeom prst="rect">
+            <a:avLst/>
+          </a:prstGeom>
+          <a:noFill/>
+        </p:spPr>
+        <p:txBody>
+          <a:bodyPr wrap="square" rtlCol="0">
+            <a:spAutoFit/>
+          </a:bodyPr>
+          <a:lstStyle/>
+          <a:p>
+            <a:r>
+              <a:rPr lang="en-US" dirty="0" smtClean="0"/>
+              <a:t>#include&lt;</a:t>
+            </a:r>
+            <a:r>
+              <a:rPr lang="en-US" dirty="0" err="1" smtClean="0"/>
+              <a:t>iostream.h</a:t>
+            </a:r>
+            <a:r>
+              <a:rPr lang="en-US" dirty="0" smtClean="0"/>
+              <a:t>&gt;</a:t>
+            </a:r>
+          </a:p>
+          <a:p>
+            <a:r>
+              <a:rPr lang="en-US" dirty="0" smtClean="0"/>
+              <a:t>#include&lt;</a:t>
+            </a:r>
+            <a:r>
+              <a:rPr lang="en-US" dirty="0" err="1" smtClean="0"/>
+              <a:t>stdlib.h</a:t>
+            </a:r>
+            <a:r>
+              <a:rPr lang="en-US" dirty="0" smtClean="0"/>
+              <a:t>&gt;</a:t>
+            </a:r>
+          </a:p>
+          <a:p>
+            <a:endParaRPr lang="en-US" dirty="0" smtClean="0"/>
+          </a:p>
+          <a:p>
+            <a:r>
+              <a:rPr lang="en-US" dirty="0" err="1" smtClean="0"/>
+              <a:t>struct</a:t>
+            </a:r>
+            <a:r>
+              <a:rPr lang="en-US" dirty="0" smtClean="0"/>
+              <a:t> node</a:t>
+            </a:r>
+          </a:p>
+          <a:p>
+            <a:r>
+              <a:rPr lang="en-US" dirty="0" smtClean="0"/>
+              <a:t>{</a:t>
+            </a:r>
+          </a:p>
+          <a:p>
+            <a:r>
+              <a:rPr lang="en-US" dirty="0" smtClean="0"/>
+              <a:t>    </a:t>
+            </a:r>
+            <a:r>
+              <a:rPr lang="en-US" dirty="0" err="1" smtClean="0"/>
+              <a:t>int</a:t>
+            </a:r>
+            <a:r>
+              <a:rPr lang="en-US" dirty="0" smtClean="0"/>
+              <a:t> info;</a:t>
+            </a:r>
+          </a:p>
+          <a:p>
+            <a:r>
+              <a:rPr lang="en-US" dirty="0" smtClean="0"/>
+              <a:t>    </a:t>
+            </a:r>
+            <a:r>
+              <a:rPr lang="en-US" dirty="0" err="1" smtClean="0"/>
+              <a:t>struct</a:t>
+            </a:r>
+            <a:r>
+              <a:rPr lang="en-US" dirty="0" smtClean="0"/>
+              <a:t> node *next;</a:t>
+            </a:r>
+          </a:p>
+          <a:p>
+            <a:r>
+              <a:rPr lang="en-US" dirty="0" smtClean="0"/>
+              <a:t>};</a:t>
+            </a:r>
+          </a:p>
+          <a:p>
+            <a:endParaRPr lang="en-US" dirty="0" smtClean="0"/>
+          </a:p>
+          <a:p>
+            <a:r>
+              <a:rPr lang="en-US" dirty="0" smtClean="0"/>
+              <a:t>void </a:t>
+            </a:r>
+            <a:r>
+              <a:rPr lang="en-US" dirty="0" err="1" smtClean="0"/>
+              <a:t>insert_linked_list_stack</a:t>
+            </a:r>
+            <a:r>
+              <a:rPr lang="en-US" dirty="0" smtClean="0"/>
+              <a:t>(</a:t>
+            </a:r>
+            <a:r>
+              <a:rPr lang="en-US" dirty="0" err="1" smtClean="0"/>
+              <a:t>struct</a:t>
+            </a:r>
+            <a:r>
+              <a:rPr lang="en-US" dirty="0" smtClean="0"/>
+              <a:t> node **,</a:t>
+            </a:r>
+            <a:r>
+              <a:rPr lang="en-US" dirty="0" err="1" smtClean="0"/>
+              <a:t>int</a:t>
+            </a:r>
+            <a:r>
+              <a:rPr lang="en-US" dirty="0" smtClean="0"/>
+              <a:t>);</a:t>
+            </a:r>
+          </a:p>
+          <a:p>
+            <a:r>
+              <a:rPr lang="en-US" dirty="0" smtClean="0"/>
+              <a:t>void </a:t>
+            </a:r>
+            <a:r>
+              <a:rPr lang="en-US" dirty="0" err="1" smtClean="0"/>
+              <a:t>delete_linked_list_stack</a:t>
+            </a:r>
+            <a:r>
+              <a:rPr lang="en-US" dirty="0" smtClean="0"/>
+              <a:t>(</a:t>
+            </a:r>
+            <a:r>
+              <a:rPr lang="en-US" dirty="0" err="1" smtClean="0"/>
+              <a:t>struct</a:t>
+            </a:r>
+            <a:r>
+              <a:rPr lang="en-US" dirty="0" smtClean="0"/>
+              <a:t> node **);</a:t>
+            </a:r>
+          </a:p>
+          <a:p>
+            <a:r>
+              <a:rPr lang="en-US" dirty="0" smtClean="0"/>
+              <a:t>void </a:t>
+            </a:r>
+            <a:r>
+              <a:rPr lang="en-US" dirty="0" err="1" smtClean="0"/>
+              <a:t>peek_linked_list_stack</a:t>
+            </a:r>
+            <a:r>
+              <a:rPr lang="en-US" dirty="0" smtClean="0"/>
+              <a:t>(</a:t>
+            </a:r>
+            <a:r>
+              <a:rPr lang="en-US" dirty="0" err="1" smtClean="0"/>
+              <a:t>struct</a:t>
+            </a:r>
+            <a:r>
+              <a:rPr lang="en-US" dirty="0" smtClean="0"/>
+              <a:t> node **);</a:t>
+            </a:r>
+          </a:p>
+          <a:p>
+            <a:r>
+              <a:rPr lang="en-US" dirty="0" smtClean="0"/>
+              <a:t>void </a:t>
+            </a:r>
+            <a:r>
+              <a:rPr lang="en-US" dirty="0" err="1" smtClean="0"/>
+              <a:t>display_linked_list_stack</a:t>
+            </a:r>
+            <a:r>
+              <a:rPr lang="en-US" dirty="0" smtClean="0"/>
+              <a:t>(</a:t>
+            </a:r>
+            <a:r>
+              <a:rPr lang="en-US" dirty="0" err="1" smtClean="0"/>
+              <a:t>struct</a:t>
+            </a:r>
+            <a:r>
+              <a:rPr lang="en-US" dirty="0" smtClean="0"/>
+              <a:t> node **);</a:t>
+            </a:r>
+          </a:p>
+          <a:p>
+            <a:endParaRPr lang="en-US" dirty="0" smtClean="0"/>
+          </a:p>
+          <a:p>
+            <a:r>
+              <a:rPr lang="en-US" dirty="0" smtClean="0"/>
+              <a:t>void main()</a:t>
+            </a:r>
+          </a:p>
+          <a:p>
+            <a:r>
+              <a:rPr lang="en-US" dirty="0" smtClean="0"/>
+              <a:t>{</a:t>
+            </a:r>
+          </a:p>
+          <a:p>
+            <a:r>
+              <a:rPr lang="en-US" dirty="0" smtClean="0"/>
+              <a:t>    </a:t>
+            </a:r>
+            <a:r>
+              <a:rPr lang="en-US" dirty="0" err="1" smtClean="0"/>
+              <a:t>struct</a:t>
+            </a:r>
+            <a:r>
+              <a:rPr lang="en-US" dirty="0" smtClean="0"/>
+              <a:t> node *top = NULL;</a:t>
+            </a:r>
+          </a:p>
+          <a:p>
+            <a:r>
+              <a:rPr lang="en-US" dirty="0" smtClean="0"/>
+              <a:t>    </a:t>
+            </a:r>
+            <a:r>
+              <a:rPr lang="en-US" dirty="0" err="1" smtClean="0"/>
+              <a:t>int</a:t>
+            </a:r>
+            <a:r>
+              <a:rPr lang="en-US" dirty="0" smtClean="0"/>
+              <a:t> </a:t>
+            </a:r>
+            <a:r>
+              <a:rPr lang="en-US" dirty="0" err="1" smtClean="0"/>
+              <a:t>ch,val</a:t>
+            </a:r>
+            <a:r>
+              <a:rPr lang="en-US" dirty="0" smtClean="0"/>
+              <a:t>;</a:t>
+            </a:r>
+          </a:p>
+          <a:p>
+            <a:endParaRPr lang="en-US" dirty="0" smtClean="0"/>
+          </a:p>
+          <a:p>
+            <a:r>
+              <a:rPr lang="en-US" dirty="0" smtClean="0"/>
+              <a:t>    </a:t>
+            </a:r>
+            <a:endParaRPr lang="en-US" dirty="0"/>
+          </a:p>
+        </p:txBody>
+      </p:sp>
+    </p:spTree>
+  </p:cSld>
+  <p:clrMapOvr>
+    <a:masterClrMapping/>
+  </p:clrMapOvr>
+</p:sld>
+</file>
+
+<file path=ppt/slides/slide15.xml><?xml version="1.0" encoding="utf-8"?>
+<p:sld xmlns:a="http://schemas.openxmlformats.org/drawingml/2006/main" xmlns:r="http://schemas.openxmlformats.org/officeDocument/2006/relationships" xmlns:p="http://schemas.openxmlformats.org/presentationml/2006/main">
+  <p:cSld>
+    <p:spTree>
+      <p:nvGrpSpPr>
+        <p:cNvPr id="1" name=""/>
+        <p:cNvGrpSpPr/>
+        <p:nvPr/>
+      </p:nvGrpSpPr>
+      <p:grpSpPr>
+        <a:xfrm>
+          <a:off x="0" y="0"/>
+          <a:ext cx="0" cy="0"/>
+          <a:chOff x="0" y="0"/>
+          <a:chExt cx="0" cy="0"/>
+        </a:xfrm>
+      </p:grpSpPr>
+      <p:sp>
+        <p:nvSpPr>
+          <p:cNvPr id="4" name="TextBox 3"/>
+          <p:cNvSpPr txBox="1"/>
+          <p:nvPr/>
+        </p:nvSpPr>
+        <p:spPr>
+          <a:xfrm>
+            <a:off x="381000" y="457200"/>
+            <a:ext cx="8458200" cy="6740307"/>
+          </a:xfrm>
+          <a:prstGeom prst="rect">
+            <a:avLst/>
+          </a:prstGeom>
+          <a:noFill/>
+        </p:spPr>
+        <p:txBody>
+          <a:bodyPr wrap="square" rtlCol="0">
+            <a:spAutoFit/>
+          </a:bodyPr>
+          <a:lstStyle/>
+          <a:p>
+            <a:r>
+              <a:rPr lang="en-US" dirty="0" smtClean="0"/>
+              <a:t>do</a:t>
+            </a:r>
+          </a:p>
+          <a:p>
+            <a:r>
+              <a:rPr lang="en-US" dirty="0" smtClean="0"/>
+              <a:t>    {</a:t>
+            </a:r>
+          </a:p>
+          <a:p>
+            <a:r>
+              <a:rPr lang="en-US" dirty="0" smtClean="0"/>
+              <a:t>	</a:t>
+            </a:r>
+            <a:r>
+              <a:rPr lang="en-US" dirty="0" err="1" smtClean="0"/>
+              <a:t>cout</a:t>
+            </a:r>
+            <a:r>
+              <a:rPr lang="en-US" dirty="0" smtClean="0"/>
+              <a:t>&lt;&lt;"\n 1. Insert \n 2. Delete \n 3. Peek \n 4. Display \n 5. Exit \n";</a:t>
+            </a:r>
+          </a:p>
+          <a:p>
+            <a:endParaRPr lang="en-US" dirty="0" smtClean="0"/>
+          </a:p>
+          <a:p>
+            <a:r>
+              <a:rPr lang="en-US" dirty="0" smtClean="0"/>
+              <a:t>	</a:t>
+            </a:r>
+            <a:r>
+              <a:rPr lang="en-US" dirty="0" err="1" smtClean="0"/>
+              <a:t>cout</a:t>
+            </a:r>
+            <a:r>
+              <a:rPr lang="en-US" dirty="0" smtClean="0"/>
+              <a:t>&lt;&lt;"\n Enter The Ch : ";</a:t>
+            </a:r>
+          </a:p>
+          <a:p>
+            <a:r>
+              <a:rPr lang="en-US" dirty="0" smtClean="0"/>
+              <a:t>	</a:t>
+            </a:r>
+            <a:r>
+              <a:rPr lang="en-US" dirty="0" err="1" smtClean="0"/>
+              <a:t>cin</a:t>
+            </a:r>
+            <a:r>
+              <a:rPr lang="en-US" dirty="0" smtClean="0"/>
+              <a:t>&gt;&gt;</a:t>
+            </a:r>
+            <a:r>
+              <a:rPr lang="en-US" dirty="0" err="1" smtClean="0"/>
+              <a:t>ch</a:t>
+            </a:r>
+            <a:r>
+              <a:rPr lang="en-US" dirty="0" smtClean="0"/>
+              <a:t>;</a:t>
+            </a:r>
+          </a:p>
+          <a:p>
+            <a:endParaRPr lang="en-US" dirty="0" smtClean="0"/>
+          </a:p>
+          <a:p>
+            <a:r>
+              <a:rPr lang="en-US" dirty="0" smtClean="0"/>
+              <a:t>	switch(</a:t>
+            </a:r>
+            <a:r>
+              <a:rPr lang="en-US" dirty="0" err="1" smtClean="0"/>
+              <a:t>ch</a:t>
+            </a:r>
+            <a:r>
+              <a:rPr lang="en-US" dirty="0" smtClean="0"/>
+              <a:t>)</a:t>
+            </a:r>
+          </a:p>
+          <a:p>
+            <a:r>
+              <a:rPr lang="en-US" dirty="0" smtClean="0"/>
+              <a:t>	{</a:t>
+            </a:r>
+          </a:p>
+          <a:p>
+            <a:r>
+              <a:rPr lang="en-US" dirty="0" smtClean="0"/>
+              <a:t>	    case 1: </a:t>
+            </a:r>
+            <a:r>
+              <a:rPr lang="en-US" dirty="0" err="1" smtClean="0"/>
+              <a:t>cout</a:t>
+            </a:r>
+            <a:r>
+              <a:rPr lang="en-US" dirty="0" smtClean="0"/>
+              <a:t>&lt;&lt;"\n Enter The Val : ";</a:t>
+            </a:r>
+          </a:p>
+          <a:p>
+            <a:r>
+              <a:rPr lang="en-US" dirty="0" smtClean="0"/>
+              <a:t>		    </a:t>
+            </a:r>
+            <a:r>
+              <a:rPr lang="en-US" dirty="0" err="1" smtClean="0"/>
+              <a:t>cin</a:t>
+            </a:r>
+            <a:r>
+              <a:rPr lang="en-US" dirty="0" smtClean="0"/>
+              <a:t>&gt;&gt;</a:t>
+            </a:r>
+            <a:r>
+              <a:rPr lang="en-US" dirty="0" err="1" smtClean="0"/>
+              <a:t>val</a:t>
+            </a:r>
+            <a:r>
+              <a:rPr lang="en-US" dirty="0" smtClean="0"/>
+              <a:t>;</a:t>
+            </a:r>
+          </a:p>
+          <a:p>
+            <a:r>
+              <a:rPr lang="en-US" dirty="0" smtClean="0"/>
+              <a:t>		    </a:t>
+            </a:r>
+            <a:r>
+              <a:rPr lang="en-US" dirty="0" err="1" smtClean="0"/>
+              <a:t>insert_linked_list_stack</a:t>
+            </a:r>
+            <a:r>
+              <a:rPr lang="en-US" dirty="0" smtClean="0"/>
+              <a:t>(&amp;</a:t>
+            </a:r>
+            <a:r>
+              <a:rPr lang="en-US" dirty="0" err="1" smtClean="0"/>
+              <a:t>top,val</a:t>
+            </a:r>
+            <a:r>
+              <a:rPr lang="en-US" dirty="0" smtClean="0"/>
+              <a:t>);</a:t>
+            </a:r>
+          </a:p>
+          <a:p>
+            <a:r>
+              <a:rPr lang="en-US" dirty="0" smtClean="0"/>
+              <a:t>		    break;</a:t>
+            </a:r>
+          </a:p>
+          <a:p>
+            <a:endParaRPr lang="en-US" dirty="0" smtClean="0"/>
+          </a:p>
+          <a:p>
+            <a:r>
+              <a:rPr lang="en-US" dirty="0" smtClean="0"/>
+              <a:t>	    case 2: </a:t>
+            </a:r>
+            <a:r>
+              <a:rPr lang="en-US" dirty="0" err="1" smtClean="0"/>
+              <a:t>delete_linked_list_stack</a:t>
+            </a:r>
+            <a:r>
+              <a:rPr lang="en-US" dirty="0" smtClean="0"/>
+              <a:t>(&amp;top);</a:t>
+            </a:r>
+          </a:p>
+          <a:p>
+            <a:r>
+              <a:rPr lang="en-US" dirty="0" smtClean="0"/>
+              <a:t>		   break;</a:t>
+            </a:r>
+          </a:p>
+          <a:p>
+            <a:endParaRPr lang="en-US" dirty="0" smtClean="0"/>
+          </a:p>
+          <a:p>
+            <a:r>
+              <a:rPr lang="en-US" dirty="0" smtClean="0"/>
+              <a:t>	    case 3: </a:t>
+            </a:r>
+            <a:r>
+              <a:rPr lang="en-US" dirty="0" err="1" smtClean="0"/>
+              <a:t>peek_linked_list_stack</a:t>
+            </a:r>
+            <a:r>
+              <a:rPr lang="en-US" dirty="0" smtClean="0"/>
+              <a:t>(&amp;top);</a:t>
+            </a:r>
+          </a:p>
+          <a:p>
+            <a:r>
+              <a:rPr lang="en-US" dirty="0" smtClean="0"/>
+              <a:t>		   break;</a:t>
+            </a:r>
+          </a:p>
+          <a:p>
+            <a:endParaRPr lang="en-US" dirty="0" smtClean="0"/>
+          </a:p>
+          <a:p>
+            <a:r>
+              <a:rPr lang="en-US" dirty="0" smtClean="0"/>
+              <a:t>	    case 4: </a:t>
+            </a:r>
+            <a:r>
+              <a:rPr lang="en-US" dirty="0" err="1" smtClean="0"/>
+              <a:t>display_linked_list_stack</a:t>
+            </a:r>
+            <a:r>
+              <a:rPr lang="en-US" dirty="0" smtClean="0"/>
+              <a:t>(&amp;top);</a:t>
+            </a:r>
+          </a:p>
+          <a:p>
+            <a:r>
+              <a:rPr lang="en-US" dirty="0" smtClean="0"/>
+              <a:t>		   break;</a:t>
+            </a:r>
+          </a:p>
+          <a:p>
+            <a:endParaRPr lang="en-US" dirty="0" smtClean="0"/>
+          </a:p>
+          <a:p>
+            <a:r>
+              <a:rPr lang="en-US" dirty="0" smtClean="0"/>
+              <a:t>	</a:t>
+            </a:r>
+            <a:endParaRPr lang="en-US" dirty="0"/>
+          </a:p>
+        </p:txBody>
+      </p:sp>
+    </p:spTree>
+  </p:cSld>
+  <p:clrMapOvr>
+    <a:masterClrMapping/>
+  </p:clrMapOvr>
+</p:sld>
+</file>
+
+<file path=ppt/slides/slide16.xml><?xml version="1.0" encoding="utf-8"?>
+<p:sld xmlns:a="http://schemas.openxmlformats.org/drawingml/2006/main" xmlns:r="http://schemas.openxmlformats.org/officeDocument/2006/relationships" xmlns:p="http://schemas.openxmlformats.org/presentationml/2006/main">
+  <p:cSld>
+    <p:spTree>
+      <p:nvGrpSpPr>
+        <p:cNvPr id="1" name=""/>
+        <p:cNvGrpSpPr/>
+        <p:nvPr/>
+      </p:nvGrpSpPr>
+      <p:grpSpPr>
+        <a:xfrm>
+          <a:off x="0" y="0"/>
+          <a:ext cx="0" cy="0"/>
+          <a:chOff x="0" y="0"/>
+          <a:chExt cx="0" cy="0"/>
+        </a:xfrm>
+      </p:grpSpPr>
+      <p:sp>
+        <p:nvSpPr>
+          <p:cNvPr id="5" name="TextBox 4"/>
+          <p:cNvSpPr txBox="1"/>
+          <p:nvPr/>
+        </p:nvSpPr>
+        <p:spPr>
+          <a:xfrm>
+            <a:off x="304800" y="381000"/>
+            <a:ext cx="8534400" cy="6740307"/>
+          </a:xfrm>
+          <a:prstGeom prst="rect">
+            <a:avLst/>
+          </a:prstGeom>
+          <a:noFill/>
+        </p:spPr>
+        <p:txBody>
+          <a:bodyPr wrap="square" rtlCol="0">
+            <a:spAutoFit/>
+          </a:bodyPr>
+          <a:lstStyle/>
+          <a:p>
+            <a:r>
+              <a:rPr lang="en-US" dirty="0" smtClean="0"/>
+              <a:t> case 5: exit(0);</a:t>
+            </a:r>
+          </a:p>
+          <a:p>
+            <a:r>
+              <a:rPr lang="en-US" dirty="0" smtClean="0"/>
+              <a:t>		    break;</a:t>
+            </a:r>
+          </a:p>
+          <a:p>
+            <a:endParaRPr lang="en-US" dirty="0" smtClean="0"/>
+          </a:p>
+          <a:p>
+            <a:r>
+              <a:rPr lang="en-US" dirty="0" smtClean="0"/>
+              <a:t>            default: </a:t>
+            </a:r>
+            <a:r>
+              <a:rPr lang="en-US" dirty="0" err="1" smtClean="0"/>
+              <a:t>cout</a:t>
+            </a:r>
+            <a:r>
+              <a:rPr lang="en-US" dirty="0" smtClean="0"/>
+              <a:t>&lt;&lt;"\n Wrong Choice";</a:t>
+            </a:r>
+          </a:p>
+          <a:p>
+            <a:r>
+              <a:rPr lang="en-US" dirty="0" smtClean="0"/>
+              <a:t>        }</a:t>
+            </a:r>
+          </a:p>
+          <a:p>
+            <a:r>
+              <a:rPr lang="en-US" dirty="0" smtClean="0"/>
+              <a:t>    } while (1);</a:t>
+            </a:r>
+          </a:p>
+          <a:p>
+            <a:r>
+              <a:rPr lang="en-US" dirty="0" smtClean="0"/>
+              <a:t>    </a:t>
+            </a:r>
+          </a:p>
+          <a:p>
+            <a:r>
+              <a:rPr lang="en-US" dirty="0" smtClean="0"/>
+              <a:t>}</a:t>
+            </a:r>
+          </a:p>
+          <a:p>
+            <a:endParaRPr lang="en-US" dirty="0" smtClean="0"/>
+          </a:p>
+          <a:p>
+            <a:r>
+              <a:rPr lang="en-US" dirty="0" smtClean="0"/>
+              <a:t>void </a:t>
+            </a:r>
+            <a:r>
+              <a:rPr lang="en-US" dirty="0" err="1" smtClean="0"/>
+              <a:t>insert_linked_list_stack</a:t>
+            </a:r>
+            <a:r>
+              <a:rPr lang="en-US" dirty="0" smtClean="0"/>
+              <a:t>(</a:t>
+            </a:r>
+            <a:r>
+              <a:rPr lang="en-US" dirty="0" err="1" smtClean="0"/>
+              <a:t>struct</a:t>
+            </a:r>
+            <a:r>
+              <a:rPr lang="en-US" dirty="0" smtClean="0"/>
+              <a:t> node **</a:t>
+            </a:r>
+            <a:r>
+              <a:rPr lang="en-US" dirty="0" err="1" smtClean="0"/>
+              <a:t>top,int</a:t>
+            </a:r>
+            <a:r>
+              <a:rPr lang="en-US" dirty="0" smtClean="0"/>
+              <a:t> </a:t>
+            </a:r>
+            <a:r>
+              <a:rPr lang="en-US" dirty="0" err="1" smtClean="0"/>
+              <a:t>val</a:t>
+            </a:r>
+            <a:r>
+              <a:rPr lang="en-US" dirty="0" smtClean="0"/>
+              <a:t>)</a:t>
+            </a:r>
+          </a:p>
+          <a:p>
+            <a:r>
+              <a:rPr lang="en-US" dirty="0" smtClean="0"/>
+              <a:t>{</a:t>
+            </a:r>
+          </a:p>
+          <a:p>
+            <a:r>
+              <a:rPr lang="en-US" dirty="0" smtClean="0"/>
+              <a:t>    </a:t>
+            </a:r>
+            <a:r>
+              <a:rPr lang="en-US" dirty="0" err="1" smtClean="0"/>
+              <a:t>struct</a:t>
+            </a:r>
+            <a:r>
+              <a:rPr lang="en-US" dirty="0" smtClean="0"/>
+              <a:t> node *</a:t>
+            </a:r>
+            <a:r>
+              <a:rPr lang="en-US" dirty="0" err="1" smtClean="0"/>
+              <a:t>nd</a:t>
+            </a:r>
+            <a:r>
+              <a:rPr lang="en-US" dirty="0" smtClean="0"/>
+              <a:t>;</a:t>
+            </a:r>
+          </a:p>
+          <a:p>
+            <a:endParaRPr lang="en-US" dirty="0" smtClean="0"/>
+          </a:p>
+          <a:p>
+            <a:r>
+              <a:rPr lang="en-US" dirty="0" smtClean="0"/>
+              <a:t>    </a:t>
+            </a:r>
+            <a:r>
+              <a:rPr lang="en-US" dirty="0" err="1" smtClean="0"/>
+              <a:t>nd</a:t>
+            </a:r>
+            <a:r>
+              <a:rPr lang="en-US" dirty="0" smtClean="0"/>
+              <a:t> = (</a:t>
+            </a:r>
+            <a:r>
+              <a:rPr lang="en-US" dirty="0" err="1" smtClean="0"/>
+              <a:t>struct</a:t>
+            </a:r>
+            <a:r>
+              <a:rPr lang="en-US" dirty="0" smtClean="0"/>
+              <a:t> node *)</a:t>
+            </a:r>
+            <a:r>
+              <a:rPr lang="en-US" dirty="0" err="1" smtClean="0"/>
+              <a:t>malloc</a:t>
+            </a:r>
+            <a:r>
+              <a:rPr lang="en-US" dirty="0" smtClean="0"/>
+              <a:t>(</a:t>
+            </a:r>
+            <a:r>
+              <a:rPr lang="en-US" dirty="0" err="1" smtClean="0"/>
+              <a:t>sizeof</a:t>
+            </a:r>
+            <a:r>
+              <a:rPr lang="en-US" dirty="0" smtClean="0"/>
+              <a:t>(</a:t>
+            </a:r>
+            <a:r>
+              <a:rPr lang="en-US" dirty="0" err="1" smtClean="0"/>
+              <a:t>struct</a:t>
+            </a:r>
+            <a:r>
+              <a:rPr lang="en-US" dirty="0" smtClean="0"/>
+              <a:t> node));</a:t>
+            </a:r>
+          </a:p>
+          <a:p>
+            <a:endParaRPr lang="en-US" dirty="0" smtClean="0"/>
+          </a:p>
+          <a:p>
+            <a:r>
+              <a:rPr lang="en-US" dirty="0" smtClean="0"/>
+              <a:t>    </a:t>
+            </a:r>
+            <a:r>
+              <a:rPr lang="en-US" dirty="0" err="1" smtClean="0"/>
+              <a:t>nd</a:t>
+            </a:r>
+            <a:r>
+              <a:rPr lang="en-US" dirty="0" smtClean="0"/>
+              <a:t>-&gt;info = </a:t>
+            </a:r>
+            <a:r>
+              <a:rPr lang="en-US" dirty="0" err="1" smtClean="0"/>
+              <a:t>val</a:t>
+            </a:r>
+            <a:r>
+              <a:rPr lang="en-US" dirty="0" smtClean="0"/>
+              <a:t>;</a:t>
+            </a:r>
+          </a:p>
+          <a:p>
+            <a:r>
+              <a:rPr lang="en-US" dirty="0" smtClean="0"/>
+              <a:t>    </a:t>
+            </a:r>
+            <a:r>
+              <a:rPr lang="en-US" dirty="0" err="1" smtClean="0"/>
+              <a:t>nd</a:t>
+            </a:r>
+            <a:r>
+              <a:rPr lang="en-US" dirty="0" smtClean="0"/>
+              <a:t>-&gt;next = *top;</a:t>
+            </a:r>
+          </a:p>
+          <a:p>
+            <a:endParaRPr lang="en-US" dirty="0" smtClean="0"/>
+          </a:p>
+          <a:p>
+            <a:r>
+              <a:rPr lang="en-US" dirty="0" smtClean="0"/>
+              <a:t>    *top = </a:t>
+            </a:r>
+            <a:r>
+              <a:rPr lang="en-US" dirty="0" err="1" smtClean="0"/>
+              <a:t>nd</a:t>
+            </a:r>
+            <a:r>
+              <a:rPr lang="en-US" dirty="0" smtClean="0"/>
+              <a:t>;</a:t>
+            </a:r>
+          </a:p>
+          <a:p>
+            <a:endParaRPr lang="en-US" dirty="0" smtClean="0"/>
+          </a:p>
+          <a:p>
+            <a:r>
+              <a:rPr lang="en-US" dirty="0" smtClean="0"/>
+              <a:t>    </a:t>
+            </a:r>
+            <a:r>
+              <a:rPr lang="en-US" dirty="0" err="1" smtClean="0"/>
+              <a:t>cout</a:t>
+            </a:r>
+            <a:r>
+              <a:rPr lang="en-US" dirty="0" smtClean="0"/>
+              <a:t>&lt;&lt;</a:t>
+            </a:r>
+            <a:r>
+              <a:rPr lang="en-US" dirty="0" err="1" smtClean="0"/>
+              <a:t>val</a:t>
+            </a:r>
+            <a:r>
+              <a:rPr lang="en-US" dirty="0" smtClean="0"/>
+              <a:t>&lt;&lt;" Value Inserted Successfully";</a:t>
+            </a:r>
+          </a:p>
+          <a:p>
+            <a:r>
+              <a:rPr lang="en-US" dirty="0" smtClean="0"/>
+              <a:t>}</a:t>
+            </a:r>
+          </a:p>
+          <a:p>
+            <a:endParaRPr lang="en-US" dirty="0" smtClean="0"/>
+          </a:p>
+          <a:p>
+            <a:endParaRPr lang="en-US" dirty="0"/>
+          </a:p>
+        </p:txBody>
+      </p:sp>
+    </p:spTree>
+  </p:cSld>
+  <p:clrMapOvr>
+    <a:masterClrMapping/>
+  </p:clrMapOvr>
+</p:sld>
+</file>
+
+<file path=ppt/slides/slide17.xml><?xml version="1.0" encoding="utf-8"?>
+<p:sld xmlns:a="http://schemas.openxmlformats.org/drawingml/2006/main" xmlns:r="http://schemas.openxmlformats.org/officeDocument/2006/relationships" xmlns:p="http://schemas.openxmlformats.org/presentationml/2006/main">
+  <p:cSld>
+    <p:spTree>
+      <p:nvGrpSpPr>
+        <p:cNvPr id="1" name=""/>
+        <p:cNvGrpSpPr/>
+        <p:nvPr/>
+      </p:nvGrpSpPr>
+      <p:grpSpPr>
+        <a:xfrm>
+          <a:off x="0" y="0"/>
+          <a:ext cx="0" cy="0"/>
+          <a:chOff x="0" y="0"/>
+          <a:chExt cx="0" cy="0"/>
+        </a:xfrm>
+      </p:grpSpPr>
+      <p:sp>
+        <p:nvSpPr>
+          <p:cNvPr id="4" name="TextBox 3"/>
+          <p:cNvSpPr txBox="1"/>
+          <p:nvPr/>
+        </p:nvSpPr>
+        <p:spPr>
+          <a:xfrm>
+            <a:off x="228600" y="381000"/>
+            <a:ext cx="8534400" cy="7017306"/>
+          </a:xfrm>
+          <a:prstGeom prst="rect">
+            <a:avLst/>
+          </a:prstGeom>
+          <a:noFill/>
+        </p:spPr>
+        <p:txBody>
+          <a:bodyPr wrap="square" rtlCol="0">
+            <a:spAutoFit/>
+          </a:bodyPr>
+          <a:lstStyle/>
+          <a:p>
+            <a:r>
+              <a:rPr lang="en-US" dirty="0" smtClean="0"/>
+              <a:t>void </a:t>
+            </a:r>
+            <a:r>
+              <a:rPr lang="en-US" dirty="0" err="1" smtClean="0"/>
+              <a:t>delete_linked_list_stack</a:t>
+            </a:r>
+            <a:r>
+              <a:rPr lang="en-US" dirty="0" smtClean="0"/>
+              <a:t>(</a:t>
+            </a:r>
+            <a:r>
+              <a:rPr lang="en-US" dirty="0" err="1" smtClean="0"/>
+              <a:t>struct</a:t>
+            </a:r>
+            <a:r>
+              <a:rPr lang="en-US" dirty="0" smtClean="0"/>
+              <a:t> node **top)</a:t>
+            </a:r>
+          </a:p>
+          <a:p>
+            <a:r>
+              <a:rPr lang="en-US" dirty="0" smtClean="0"/>
+              <a:t>{</a:t>
+            </a:r>
+          </a:p>
+          <a:p>
+            <a:r>
+              <a:rPr lang="en-US" dirty="0" smtClean="0"/>
+              <a:t>    </a:t>
+            </a:r>
+            <a:r>
+              <a:rPr lang="en-US" dirty="0" err="1" smtClean="0"/>
+              <a:t>struct</a:t>
+            </a:r>
+            <a:r>
+              <a:rPr lang="en-US" dirty="0" smtClean="0"/>
+              <a:t> node *temp;</a:t>
+            </a:r>
+          </a:p>
+          <a:p>
+            <a:r>
+              <a:rPr lang="en-US" dirty="0" smtClean="0"/>
+              <a:t>    if(*top == NULL)</a:t>
+            </a:r>
+          </a:p>
+          <a:p>
+            <a:r>
+              <a:rPr lang="en-US" dirty="0" smtClean="0"/>
+              <a:t>    {</a:t>
+            </a:r>
+          </a:p>
+          <a:p>
+            <a:r>
+              <a:rPr lang="en-US" dirty="0" smtClean="0"/>
+              <a:t>        </a:t>
+            </a:r>
+            <a:r>
+              <a:rPr lang="en-US" dirty="0" err="1" smtClean="0"/>
+              <a:t>cout</a:t>
+            </a:r>
+            <a:r>
+              <a:rPr lang="en-US" dirty="0" smtClean="0"/>
+              <a:t>&lt;&lt;"\n Stack Underflow";</a:t>
+            </a:r>
+          </a:p>
+          <a:p>
+            <a:r>
+              <a:rPr lang="en-US" dirty="0" smtClean="0"/>
+              <a:t>        return;</a:t>
+            </a:r>
+          </a:p>
+          <a:p>
+            <a:r>
+              <a:rPr lang="en-US" dirty="0" smtClean="0"/>
+              <a:t>    }</a:t>
+            </a:r>
+          </a:p>
+          <a:p>
+            <a:endParaRPr lang="en-US" dirty="0" smtClean="0"/>
+          </a:p>
+          <a:p>
+            <a:r>
+              <a:rPr lang="en-US" dirty="0" smtClean="0"/>
+              <a:t>    temp = *top;</a:t>
+            </a:r>
+          </a:p>
+          <a:p>
+            <a:endParaRPr lang="en-US" dirty="0" smtClean="0"/>
+          </a:p>
+          <a:p>
+            <a:r>
+              <a:rPr lang="en-US" dirty="0" smtClean="0"/>
+              <a:t>    </a:t>
+            </a:r>
+            <a:r>
+              <a:rPr lang="en-US" dirty="0" err="1" smtClean="0"/>
+              <a:t>cout</a:t>
+            </a:r>
+            <a:r>
+              <a:rPr lang="en-US" dirty="0" smtClean="0"/>
+              <a:t>&lt;&lt;"\n"&lt;&lt;(*top)-&gt;info&lt;&lt;" Value </a:t>
+            </a:r>
+            <a:r>
+              <a:rPr lang="en-US" dirty="0" err="1" smtClean="0"/>
+              <a:t>Poped</a:t>
+            </a:r>
+            <a:r>
+              <a:rPr lang="en-US" dirty="0" smtClean="0"/>
+              <a:t>";</a:t>
+            </a:r>
+          </a:p>
+          <a:p>
+            <a:r>
+              <a:rPr lang="en-US" dirty="0" smtClean="0"/>
+              <a:t>    *top = (*top)-&gt;next;</a:t>
+            </a:r>
+          </a:p>
+          <a:p>
+            <a:endParaRPr lang="en-US" dirty="0" smtClean="0"/>
+          </a:p>
+          <a:p>
+            <a:r>
+              <a:rPr lang="en-US" dirty="0" smtClean="0"/>
+              <a:t>    delete temp;</a:t>
+            </a:r>
+          </a:p>
+          <a:p>
+            <a:r>
+              <a:rPr lang="en-US" dirty="0" smtClean="0"/>
+              <a:t>}</a:t>
+            </a:r>
+          </a:p>
+          <a:p>
+            <a:endParaRPr lang="en-US" dirty="0" smtClean="0"/>
+          </a:p>
+          <a:p>
+            <a:r>
+              <a:rPr lang="en-US" dirty="0" smtClean="0"/>
+              <a:t>void </a:t>
+            </a:r>
+            <a:r>
+              <a:rPr lang="en-US" dirty="0" err="1" smtClean="0"/>
+              <a:t>peek_linked_list_stack</a:t>
+            </a:r>
+            <a:r>
+              <a:rPr lang="en-US" dirty="0" smtClean="0"/>
+              <a:t>(</a:t>
+            </a:r>
+            <a:r>
+              <a:rPr lang="en-US" dirty="0" err="1" smtClean="0"/>
+              <a:t>struct</a:t>
+            </a:r>
+            <a:r>
+              <a:rPr lang="en-US" dirty="0" smtClean="0"/>
+              <a:t> node **top)</a:t>
+            </a:r>
+          </a:p>
+          <a:p>
+            <a:r>
+              <a:rPr lang="en-US" dirty="0" smtClean="0"/>
+              <a:t>{</a:t>
+            </a:r>
+          </a:p>
+          <a:p>
+            <a:r>
+              <a:rPr lang="en-US" dirty="0" smtClean="0"/>
+              <a:t>    if(*top == NULL)</a:t>
+            </a:r>
+          </a:p>
+          <a:p>
+            <a:r>
+              <a:rPr lang="en-US" dirty="0" smtClean="0"/>
+              <a:t>    {</a:t>
+            </a:r>
+          </a:p>
+          <a:p>
+            <a:r>
+              <a:rPr lang="en-US" dirty="0" smtClean="0"/>
+              <a:t>        </a:t>
+            </a:r>
+            <a:r>
+              <a:rPr lang="en-US" dirty="0" err="1" smtClean="0"/>
+              <a:t>cout</a:t>
+            </a:r>
+            <a:r>
+              <a:rPr lang="en-US" dirty="0" smtClean="0"/>
+              <a:t>&lt;&lt;"\n Stack Underflow";</a:t>
+            </a:r>
+          </a:p>
+          <a:p>
+            <a:r>
+              <a:rPr lang="en-US" dirty="0" smtClean="0"/>
+              <a:t>    }</a:t>
+            </a:r>
+          </a:p>
+          <a:p>
+            <a:endParaRPr lang="en-US" dirty="0" smtClean="0"/>
+          </a:p>
+          <a:p>
+            <a:r>
+              <a:rPr lang="en-US" dirty="0" smtClean="0"/>
+              <a:t>   </a:t>
+            </a:r>
+            <a:endParaRPr lang="en-US" dirty="0"/>
+          </a:p>
+        </p:txBody>
+      </p:sp>
+    </p:spTree>
+  </p:cSld>
+  <p:clrMapOvr>
+    <a:masterClrMapping/>
+  </p:clrMapOvr>
+</p:sld>
+</file>
+
+<file path=ppt/slides/slide18.xml><?xml version="1.0" encoding="utf-8"?>
+<p:sld xmlns:a="http://schemas.openxmlformats.org/drawingml/2006/main" xmlns:r="http://schemas.openxmlformats.org/officeDocument/2006/relationships" xmlns:p="http://schemas.openxmlformats.org/presentationml/2006/main">
+  <p:cSld>
+    <p:spTree>
+      <p:nvGrpSpPr>
+        <p:cNvPr id="1" name=""/>
+        <p:cNvGrpSpPr/>
+        <p:nvPr/>
+      </p:nvGrpSpPr>
+      <p:grpSpPr>
+        <a:xfrm>
+          <a:off x="0" y="0"/>
+          <a:ext cx="0" cy="0"/>
+          <a:chOff x="0" y="0"/>
+          <a:chExt cx="0" cy="0"/>
+        </a:xfrm>
+      </p:grpSpPr>
+      <p:sp>
+        <p:nvSpPr>
+          <p:cNvPr id="4" name="TextBox 3"/>
+          <p:cNvSpPr txBox="1"/>
+          <p:nvPr/>
+        </p:nvSpPr>
+        <p:spPr>
+          <a:xfrm>
+            <a:off x="457200" y="457200"/>
+            <a:ext cx="8305800" cy="6186309"/>
+          </a:xfrm>
+          <a:prstGeom prst="rect">
+            <a:avLst/>
+          </a:prstGeom>
+          <a:noFill/>
+        </p:spPr>
+        <p:txBody>
+          <a:bodyPr wrap="square" rtlCol="0">
+            <a:spAutoFit/>
+          </a:bodyPr>
+          <a:lstStyle/>
+          <a:p>
+            <a:r>
+              <a:rPr lang="en-US" dirty="0" smtClean="0"/>
+              <a:t> </a:t>
+            </a:r>
+            <a:r>
+              <a:rPr lang="en-US" dirty="0" err="1" smtClean="0"/>
+              <a:t>cout</a:t>
+            </a:r>
+            <a:r>
+              <a:rPr lang="en-US" dirty="0" smtClean="0"/>
+              <a:t>&lt;&lt;"Peek Value : "&lt;&lt;(*top)-&gt;info&lt;&lt;</a:t>
+            </a:r>
+            <a:r>
+              <a:rPr lang="en-US" dirty="0" err="1" smtClean="0"/>
+              <a:t>endl</a:t>
+            </a:r>
+            <a:r>
+              <a:rPr lang="en-US" dirty="0" smtClean="0"/>
+              <a:t>;</a:t>
+            </a:r>
+          </a:p>
+          <a:p>
+            <a:r>
+              <a:rPr lang="en-US" dirty="0" smtClean="0"/>
+              <a:t>}</a:t>
+            </a:r>
+          </a:p>
+          <a:p>
+            <a:endParaRPr lang="en-US" dirty="0" smtClean="0"/>
+          </a:p>
+          <a:p>
+            <a:r>
+              <a:rPr lang="en-US" dirty="0" smtClean="0"/>
+              <a:t>void </a:t>
+            </a:r>
+            <a:r>
+              <a:rPr lang="en-US" dirty="0" err="1" smtClean="0"/>
+              <a:t>display_linked_list_stack</a:t>
+            </a:r>
+            <a:r>
+              <a:rPr lang="en-US" dirty="0" smtClean="0"/>
+              <a:t>(</a:t>
+            </a:r>
+            <a:r>
+              <a:rPr lang="en-US" dirty="0" err="1" smtClean="0"/>
+              <a:t>struct</a:t>
+            </a:r>
+            <a:r>
+              <a:rPr lang="en-US" dirty="0" smtClean="0"/>
+              <a:t> node **top)</a:t>
+            </a:r>
+          </a:p>
+          <a:p>
+            <a:r>
+              <a:rPr lang="en-US" dirty="0" smtClean="0"/>
+              <a:t>{</a:t>
+            </a:r>
+          </a:p>
+          <a:p>
+            <a:r>
+              <a:rPr lang="en-US" dirty="0" smtClean="0"/>
+              <a:t>    </a:t>
+            </a:r>
+            <a:r>
+              <a:rPr lang="en-US" dirty="0" err="1" smtClean="0"/>
+              <a:t>struct</a:t>
+            </a:r>
+            <a:r>
+              <a:rPr lang="en-US" dirty="0" smtClean="0"/>
+              <a:t> node *temp;</a:t>
+            </a:r>
+          </a:p>
+          <a:p>
+            <a:endParaRPr lang="en-US" dirty="0" smtClean="0"/>
+          </a:p>
+          <a:p>
+            <a:r>
+              <a:rPr lang="en-US" dirty="0" smtClean="0"/>
+              <a:t>    temp = *top;</a:t>
+            </a:r>
+          </a:p>
+          <a:p>
+            <a:endParaRPr lang="en-US" dirty="0" smtClean="0"/>
+          </a:p>
+          <a:p>
+            <a:r>
+              <a:rPr lang="en-US" dirty="0" smtClean="0"/>
+              <a:t>    if(temp == NULL)</a:t>
+            </a:r>
+          </a:p>
+          <a:p>
+            <a:r>
+              <a:rPr lang="en-US" dirty="0" smtClean="0"/>
+              <a:t>    {</a:t>
+            </a:r>
+          </a:p>
+          <a:p>
+            <a:r>
+              <a:rPr lang="en-US" dirty="0" smtClean="0"/>
+              <a:t>        </a:t>
+            </a:r>
+            <a:r>
+              <a:rPr lang="en-US" dirty="0" err="1" smtClean="0"/>
+              <a:t>cout</a:t>
+            </a:r>
+            <a:r>
+              <a:rPr lang="en-US" dirty="0" smtClean="0"/>
+              <a:t>&lt;&lt;"\n Stack Underflow";</a:t>
+            </a:r>
+          </a:p>
+          <a:p>
+            <a:r>
+              <a:rPr lang="en-US" dirty="0" smtClean="0"/>
+              <a:t>        return;</a:t>
+            </a:r>
+          </a:p>
+          <a:p>
+            <a:r>
+              <a:rPr lang="en-US" dirty="0" smtClean="0"/>
+              <a:t>    }</a:t>
+            </a:r>
+          </a:p>
+          <a:p>
+            <a:endParaRPr lang="en-US" dirty="0" smtClean="0"/>
+          </a:p>
+          <a:p>
+            <a:r>
+              <a:rPr lang="en-US" dirty="0" smtClean="0"/>
+              <a:t>    while(temp != NULL)</a:t>
+            </a:r>
+          </a:p>
+          <a:p>
+            <a:r>
+              <a:rPr lang="en-US" dirty="0" smtClean="0"/>
+              <a:t>    {</a:t>
+            </a:r>
+          </a:p>
+          <a:p>
+            <a:r>
+              <a:rPr lang="en-US" dirty="0" smtClean="0"/>
+              <a:t>        </a:t>
+            </a:r>
+            <a:r>
+              <a:rPr lang="en-US" dirty="0" err="1" smtClean="0"/>
+              <a:t>cout</a:t>
+            </a:r>
+            <a:r>
+              <a:rPr lang="en-US" dirty="0" smtClean="0"/>
+              <a:t>&lt;&lt;"\n"&lt;&lt;temp-&gt;info&lt;&lt;</a:t>
+            </a:r>
+            <a:r>
+              <a:rPr lang="en-US" dirty="0" err="1" smtClean="0"/>
+              <a:t>endl</a:t>
+            </a:r>
+            <a:r>
+              <a:rPr lang="en-US" dirty="0" smtClean="0"/>
+              <a:t>;</a:t>
+            </a:r>
+          </a:p>
+          <a:p>
+            <a:r>
+              <a:rPr lang="en-US" dirty="0" smtClean="0"/>
+              <a:t>        temp = temp-&gt;next;</a:t>
+            </a:r>
+          </a:p>
+          <a:p>
+            <a:r>
+              <a:rPr lang="en-US" dirty="0" smtClean="0"/>
+              <a:t>    }</a:t>
+            </a:r>
+          </a:p>
+          <a:p>
+            <a:r>
+              <a:rPr lang="en-US" dirty="0" smtClean="0"/>
+              <a:t>}</a:t>
+            </a:r>
+          </a:p>
+          <a:p>
+            <a:endParaRPr lang="en-US" dirty="0"/>
+          </a:p>
+        </p:txBody>
+      </p:sp>
+    </p:spTree>
+  </p:cSld>
+  <p:clrMapOvr>
+    <a:masterClrMapping/>
+  </p:clrMapOvr>
 </p:sld>
 </file>
 
@@ -6824,8 +8246,8 @@
         </p:nvSpPr>
         <p:spPr>
           <a:xfrm>
-            <a:off x="1981200" y="3124200"/>
-            <a:ext cx="7772400" cy="2677656"/>
+            <a:off x="2209800" y="2887682"/>
+            <a:ext cx="7772400" cy="3970318"/>
           </a:xfrm>
           <a:prstGeom prst="rect">
             <a:avLst/>
@@ -6839,6 +8261,9 @@
           <a:lstStyle/>
           <a:p>
             <a:pPr marL="342900" indent="-342900" algn="just">
+              <a:lnSpc>
+                <a:spcPct val="150000"/>
+              </a:lnSpc>
               <a:buFont typeface="+mj-lt"/>
               <a:buAutoNum type="arabicPeriod"/>
             </a:pPr>
@@ -6849,6 +8274,9 @@
           </a:p>
           <a:p>
             <a:pPr marL="342900" indent="-342900" algn="just">
+              <a:lnSpc>
+                <a:spcPct val="150000"/>
+              </a:lnSpc>
               <a:buFont typeface="+mj-lt"/>
               <a:buAutoNum type="arabicPeriod"/>
             </a:pPr>
@@ -6859,6 +8287,9 @@
           </a:p>
           <a:p>
             <a:pPr marL="342900" indent="-342900" algn="just">
+              <a:lnSpc>
+                <a:spcPct val="150000"/>
+              </a:lnSpc>
               <a:buFont typeface="+mj-lt"/>
               <a:buAutoNum type="arabicPeriod"/>
             </a:pPr>
@@ -6869,6 +8300,9 @@
           </a:p>
           <a:p>
             <a:pPr marL="342900" indent="-342900" algn="just">
+              <a:lnSpc>
+                <a:spcPct val="150000"/>
+              </a:lnSpc>
               <a:buFont typeface="+mj-lt"/>
               <a:buAutoNum type="arabicPeriod"/>
             </a:pPr>
@@ -6879,6 +8313,9 @@
           </a:p>
           <a:p>
             <a:pPr marL="342900" indent="-342900" algn="just">
+              <a:lnSpc>
+                <a:spcPct val="150000"/>
+              </a:lnSpc>
               <a:buFont typeface="+mj-lt"/>
               <a:buAutoNum type="arabicPeriod"/>
             </a:pPr>
@@ -6889,6 +8326,9 @@
           </a:p>
           <a:p>
             <a:pPr marL="342900" indent="-342900" algn="just">
+              <a:lnSpc>
+                <a:spcPct val="150000"/>
+              </a:lnSpc>
               <a:buFont typeface="+mj-lt"/>
               <a:buAutoNum type="arabicPeriod"/>
             </a:pPr>
@@ -7016,7 +8456,7 @@
         <p:spPr>
           <a:xfrm>
             <a:off x="1752600" y="2667000"/>
-            <a:ext cx="7772400" cy="2677656"/>
+            <a:ext cx="7772400" cy="3913059"/>
           </a:xfrm>
           <a:prstGeom prst="rect">
             <a:avLst/>
@@ -7030,6 +8470,9 @@
           <a:lstStyle/>
           <a:p>
             <a:pPr marL="342900" indent="-342900" algn="just">
+              <a:lnSpc>
+                <a:spcPct val="150000"/>
+              </a:lnSpc>
               <a:buFont typeface="+mj-lt"/>
               <a:buAutoNum type="arabicPeriod"/>
             </a:pPr>
@@ -7040,6 +8483,9 @@
           </a:p>
           <a:p>
             <a:pPr marL="342900" indent="-342900" algn="just">
+              <a:lnSpc>
+                <a:spcPct val="150000"/>
+              </a:lnSpc>
               <a:buFont typeface="+mj-lt"/>
               <a:buAutoNum type="arabicPeriod"/>
             </a:pPr>
@@ -7049,18 +8495,22 @@
             </a:r>
           </a:p>
           <a:p>
-            <a:pPr marL="342900" indent="-342900" algn="just"/>
+            <a:pPr marL="342900" indent="-342900" algn="just">
+              <a:lnSpc>
+                <a:spcPct val="150000"/>
+              </a:lnSpc>
+            </a:pPr>
             <a:r>
               <a:rPr lang="en-US" sz="2400" dirty="0" smtClean="0"/>
-              <a:t>	Print(‘</a:t>
-            </a:r>
-            <a:r>
-              <a:rPr lang="en-US" sz="2400" dirty="0" smtClean="0"/>
-              <a:t>Stack Empty’)</a:t>
-            </a:r>
-          </a:p>
-          <a:p>
-            <a:pPr marL="342900" indent="-342900" algn="just"/>
+              <a:t>	Print(‘Stack Empty’)</a:t>
+            </a:r>
+          </a:p>
+          <a:p>
+            <a:pPr marL="342900" indent="-342900" algn="just">
+              <a:lnSpc>
+                <a:spcPct val="150000"/>
+              </a:lnSpc>
+            </a:pPr>
             <a:r>
               <a:rPr lang="en-US" sz="2400" dirty="0"/>
               <a:t>	</a:t>
@@ -7071,14 +8521,22 @@
             </a:r>
           </a:p>
           <a:p>
-            <a:pPr marL="342900" indent="-342900" algn="just"/>
+            <a:pPr marL="342900" indent="-342900" algn="just">
+              <a:lnSpc>
+                <a:spcPct val="150000"/>
+              </a:lnSpc>
+            </a:pPr>
             <a:r>
               <a:rPr lang="en-US" sz="2400" dirty="0" smtClean="0"/>
               <a:t>3. Print TOP-&gt;DATA</a:t>
             </a:r>
           </a:p>
           <a:p>
-            <a:pPr marL="514350" indent="-514350" algn="just"/>
+            <a:pPr marL="514350" indent="-514350" algn="just">
+              <a:lnSpc>
+                <a:spcPct val="150000"/>
+              </a:lnSpc>
+            </a:pPr>
             <a:r>
               <a:rPr lang="en-US" sz="2400" dirty="0"/>
               <a:t>4</a:t>
@@ -7089,7 +8547,11 @@
             </a:r>
           </a:p>
           <a:p>
-            <a:pPr marL="342900" indent="-342900" algn="just"/>
+            <a:pPr marL="342900" indent="-342900" algn="just">
+              <a:lnSpc>
+                <a:spcPct val="150000"/>
+              </a:lnSpc>
+            </a:pPr>
             <a:r>
               <a:rPr lang="en-US" sz="2400" dirty="0" smtClean="0"/>
               <a:t>5. STOP </a:t>
